--- a/presentation/CL61_offset_electronique_FR.pptx
+++ b/presentation/CL61_offset_electronique_FR.pptx
@@ -17,6 +17,7 @@
     <p:sldId id="265" r:id="rId16"/>
     <p:sldId id="266" r:id="rId17"/>
     <p:sldId id="267" r:id="rId18"/>
+    <p:sldId id="268" r:id="rId19"/>
   </p:sldIdLst>
   <p:sldSz cx="12191695" cy="6858000" type="screen4x3"/>
   <p:notesSz cx="6858000" cy="9144000"/>
@@ -3269,7 +3270,7 @@
               </a:defRPr>
             </a:pPr>
             <a:r>
-              <a:t>Ce que dit la litterature</a:t>
+              <a:t>Le phenomene est universel : les 3 instruments co-localises</a:t>
             </a:r>
           </a:p>
         </p:txBody>
@@ -3308,21 +3309,45 @@
               </a:defRPr>
             </a:pPr>
             <a:r>
-              <a:t>Le phenomene est documente — le modele physique et la quantification C_L sont notre apport</a:t>
-            </a:r>
-          </a:p>
-        </p:txBody>
-      </p:sp>
-      <p:sp>
-        <p:nvSpPr>
-          <p:cNvPr id="4" name="TextBox 3"/>
+              <a:t>Payerne CHM15k / CL31 / CL61 sous capot (4 sessions) — offset en % du signal moleculaire propre a chaque instrument</a:t>
+            </a:r>
+          </a:p>
+        </p:txBody>
+      </p:sp>
+      <p:pic>
+        <p:nvPicPr>
+          <p:cNvPr id="4" name="Picture 3" descr="fig_hood_fractional_bias.png"/>
+          <p:cNvPicPr>
+            <a:picLocks noChangeAspect="1"/>
+          </p:cNvPicPr>
+          <p:nvPr/>
+        </p:nvPicPr>
+        <p:blipFill>
+          <a:blip r:embed="rId2"/>
+          <a:stretch>
+            <a:fillRect/>
+          </a:stretch>
+        </p:blipFill>
+        <p:spPr>
+          <a:xfrm>
+            <a:off x="274320" y="1463040"/>
+            <a:ext cx="7955279" cy="2901337"/>
+          </a:xfrm>
+          <a:prstGeom prst="rect">
+            <a:avLst/>
+          </a:prstGeom>
+        </p:spPr>
+      </p:pic>
+      <p:sp>
+        <p:nvSpPr>
+          <p:cNvPr id="5" name="TextBox 4"/>
           <p:cNvSpPr txBox="1"/>
           <p:nvPr/>
         </p:nvSpPr>
         <p:spPr>
           <a:xfrm>
-            <a:off x="502920" y="1554480"/>
-            <a:ext cx="3566160" cy="4389120"/>
+            <a:off x="8366760" y="1508760"/>
+            <a:ext cx="3611880" cy="4937760"/>
           </a:xfrm>
           <a:prstGeom prst="rect">
             <a:avLst/>
@@ -3339,7 +3364,39 @@
               <a:spcAft>
                 <a:spcPts val="400"/>
               </a:spcAft>
-              <a:defRPr sz="1400" b="1">
+              <a:defRPr sz="1300" b="1">
+                <a:solidFill>
+                  <a:srgbClr val="D62728"/>
+                </a:solidFill>
+                <a:latin typeface="Calibri"/>
+              </a:defRPr>
+            </a:pPr>
+            <a:r>
+              <a:t>CHM15k (la reference !)</a:t>
+            </a:r>
+          </a:p>
+          <a:p>
+            <a:pPr algn="l">
+              <a:spcAft>
+                <a:spcPts val="400"/>
+              </a:spcAft>
+              <a:defRPr sz="1100" b="0">
+                <a:solidFill>
+                  <a:srgbClr val="36454F"/>
+                </a:solidFill>
+                <a:latin typeface="Calibri"/>
+              </a:defRPr>
+            </a:pPr>
+            <a:r>
+              <a:t>−15…−25 % dans la fenetre 3-5 km — PLUS GRAND que le CL61. Verifie : offset retire → C_L +11.5 % (vrai biais de calibration).</a:t>
+            </a:r>
+          </a:p>
+          <a:p>
+            <a:pPr algn="l">
+              <a:spcAft>
+                <a:spcPts val="400"/>
+              </a:spcAft>
+              <a:defRPr sz="1300" b="1">
                 <a:solidFill>
                   <a:srgbClr val="1F77B4"/>
                 </a:solidFill>
@@ -3347,15 +3404,15 @@
               </a:defRPr>
             </a:pPr>
             <a:r>
-              <a:t>Kotthaus et al. 2016 (AMT) — CL31</a:t>
-            </a:r>
-          </a:p>
-          <a:p>
-            <a:pPr algn="l">
-              <a:spcAft>
-                <a:spcPts val="400"/>
-              </a:spcAft>
-              <a:defRPr sz="1200" b="0">
+              <a:t>Mais l'ancre tient</a:t>
+            </a:r>
+          </a:p>
+          <a:p>
+            <a:pPr algn="l">
+              <a:spcAft>
+                <a:spcPts val="400"/>
+              </a:spcAft>
+              <a:defRPr sz="1100" b="0">
                 <a:solidFill>
                   <a:srgbClr val="36454F"/>
                 </a:solidFill>
@@ -3363,54 +3420,31 @@
               </a:defRPr>
             </a:pPr>
             <a:r>
-              <a:t>APD couplee en AC avec « zero variable » : baseline negative dependante de la distance (« cosmetic shift »), non nulle jusqu'a ~5.5 km, dependante de la temperature ; correction hood OBLIGATOIRE avant calibration. Le cas d'ecole du couplage AC.</a:t>
-            </a:r>
-          </a:p>
-        </p:txBody>
-      </p:sp>
-      <p:sp>
-        <p:nvSpPr>
-          <p:cNvPr id="5" name="TextBox 4"/>
-          <p:cNvSpPr txBox="1"/>
-          <p:nvPr/>
-        </p:nvSpPr>
-        <p:spPr>
-          <a:xfrm>
-            <a:off x="4434840" y="1554480"/>
-            <a:ext cx="3566160" cy="4389120"/>
-          </a:xfrm>
-          <a:prstGeom prst="rect">
-            <a:avLst/>
-          </a:prstGeom>
-          <a:noFill/>
-        </p:spPr>
-        <p:txBody>
-          <a:bodyPr wrap="square">
-            <a:spAutoFit/>
-          </a:bodyPr>
-          <a:lstStyle/>
-          <a:p>
-            <a:pPr algn="l">
-              <a:spcAft>
-                <a:spcPts val="400"/>
-              </a:spcAft>
-              <a:defRPr sz="1400" b="1">
-                <a:solidFill>
-                  <a:srgbClr val="1F77B4"/>
+              <a:t>la constante NUAGE du CHM15k vient du signal fort proche (0.1-2.4 km), immunisee → aucune constante Rayleigh de ceilometre n'est une reference propre.</a:t>
+            </a:r>
+          </a:p>
+          <a:p>
+            <a:pPr algn="l">
+              <a:spcAft>
+                <a:spcPts val="400"/>
+              </a:spcAft>
+              <a:defRPr sz="1300" b="1">
+                <a:solidFill>
+                  <a:srgbClr val="9467BD"/>
                 </a:solidFill>
                 <a:latin typeface="Calibri"/>
               </a:defRPr>
             </a:pPr>
             <a:r>
-              <a:t>Le et al. 2026 (AMT, en revision) — CL61</a:t>
-            </a:r>
-          </a:p>
-          <a:p>
-            <a:pPr algn="l">
-              <a:spcAft>
-                <a:spcPts val="400"/>
-              </a:spcAft>
-              <a:defRPr sz="1200" b="0">
+              <a:t>CL31 : non calibrable en Rayleigh</a:t>
+            </a:r>
+          </a:p>
+          <a:p>
+            <a:pPr algn="l">
+              <a:spcAft>
+                <a:spcPts val="400"/>
+              </a:spcAft>
+              <a:defRPr sz="1100" b="0">
                 <a:solidFill>
                   <a:srgbClr val="36454F"/>
                 </a:solidFill>
@@ -3418,101 +3452,23 @@
               </a:defRPr>
             </a:pPr>
             <a:r>
-              <a:t>« Residual background components may still remain » apres la correction interne ; soustraction hood P(r,T) indexee en temperature, repetee tous les ~6 mois ; une unite biaisee des 5 km — dans la fenetre Rayleigh.</a:t>
-            </a:r>
-          </a:p>
-        </p:txBody>
-      </p:sp>
-      <p:sp>
-        <p:nvSpPr>
-          <p:cNvPr id="6" name="TextBox 5"/>
-          <p:cNvSpPr txBox="1"/>
-          <p:nvPr/>
-        </p:nvSpPr>
-        <p:spPr>
-          <a:xfrm>
-            <a:off x="8366760" y="1554480"/>
-            <a:ext cx="3566160" cy="4389120"/>
-          </a:xfrm>
-          <a:prstGeom prst="rect">
-            <a:avLst/>
-          </a:prstGeom>
-          <a:noFill/>
-        </p:spPr>
-        <p:txBody>
-          <a:bodyPr wrap="square">
-            <a:spAutoFit/>
-          </a:bodyPr>
-          <a:lstStyle/>
-          <a:p>
-            <a:pPr algn="l">
-              <a:spcAft>
-                <a:spcPts val="400"/>
-              </a:spcAft>
-              <a:defRPr sz="1400" b="1">
-                <a:solidFill>
-                  <a:srgbClr val="1F77B4"/>
+              <a:t>offset ≳ signal moleculaire a 3-5 km → explique le statut operationnel CL31/CL51.</a:t>
+            </a:r>
+          </a:p>
+          <a:p>
+            <a:pPr algn="l">
+              <a:spcAft>
+                <a:spcPts val="400"/>
+              </a:spcAft>
+              <a:defRPr sz="1050" b="0">
+                <a:solidFill>
+                  <a:srgbClr val="6E7B84"/>
                 </a:solidFill>
                 <a:latin typeface="Calibri"/>
               </a:defRPr>
             </a:pPr>
             <a:r>
-              <a:t>Hopkin 2019 · Looschelders 2025 · electronique nucleaire</a:t>
-            </a:r>
-          </a:p>
-          <a:p>
-            <a:pPr algn="l">
-              <a:spcAft>
-                <a:spcPts val="400"/>
-              </a:spcAft>
-              <a:defRPr sz="1200" b="0">
-                <a:solidFill>
-                  <a:srgbClr val="36454F"/>
-                </a:solidFill>
-                <a:latin typeface="Calibri"/>
-              </a:defRPr>
-            </a:pPr>
-            <a:r>
-              <a:t>« Doivent etre corriges pour les signaux faibles… negligeables pour les nuages » → la divergence exacte de nos 2 methodes. Le baseline shift des chaines AC a fort taux est un classique (Knoll) : remede = baseline restorer / compensation pole-zero.</a:t>
-            </a:r>
-          </a:p>
-        </p:txBody>
-      </p:sp>
-      <p:sp>
-        <p:nvSpPr>
-          <p:cNvPr id="7" name="TextBox 6"/>
-          <p:cNvSpPr txBox="1"/>
-          <p:nvPr/>
-        </p:nvSpPr>
-        <p:spPr>
-          <a:xfrm>
-            <a:off x="502920" y="5943600"/>
-            <a:ext cx="11155680" cy="640080"/>
-          </a:xfrm>
-          <a:prstGeom prst="rect">
-            <a:avLst/>
-          </a:prstGeom>
-          <a:noFill/>
-        </p:spPr>
-        <p:txBody>
-          <a:bodyPr wrap="square">
-            <a:spAutoFit/>
-          </a:bodyPr>
-          <a:lstStyle/>
-          <a:p>
-            <a:pPr algn="l">
-              <a:spcAft>
-                <a:spcPts val="400"/>
-              </a:spcAft>
-              <a:defRPr sz="1300" b="1">
-                <a:solidFill>
-                  <a:srgbClr val="36454F"/>
-                </a:solidFill>
-                <a:latin typeface="Calibri"/>
-              </a:defRPr>
-            </a:pPr>
-            <a:r>
-              <a:t>Nouveaute : (i) quantifier le biais de C_L induit par l'offset dans un ajustement moleculaire 2–6 km ; (ii) un MODELE physique de l'offset (reponse a couplage AC, τ_p / τ_u) — extrapolable en distance, indexable en temperature.</a:t>
+              <a:t>Mecanisme different (CHM15k photon-counting = sur-soustraction fond/overlap ; CL61 = undershoot AC), mais effet net partage : offset negatif en signal faible.</a:t>
             </a:r>
           </a:p>
         </p:txBody>
@@ -3569,7 +3525,7 @@
               </a:defRPr>
             </a:pPr>
             <a:r>
-              <a:t>Solutions</a:t>
+              <a:t>Ce que dit la litterature</a:t>
             </a:r>
           </a:p>
         </p:txBody>
@@ -3608,6 +3564,306 @@
               </a:defRPr>
             </a:pPr>
             <a:r>
+              <a:t>Le phenomene est documente — le modele physique et la quantification C_L sont notre apport</a:t>
+            </a:r>
+          </a:p>
+        </p:txBody>
+      </p:sp>
+      <p:sp>
+        <p:nvSpPr>
+          <p:cNvPr id="4" name="TextBox 3"/>
+          <p:cNvSpPr txBox="1"/>
+          <p:nvPr/>
+        </p:nvSpPr>
+        <p:spPr>
+          <a:xfrm>
+            <a:off x="502920" y="1554480"/>
+            <a:ext cx="3566160" cy="4389120"/>
+          </a:xfrm>
+          <a:prstGeom prst="rect">
+            <a:avLst/>
+          </a:prstGeom>
+          <a:noFill/>
+        </p:spPr>
+        <p:txBody>
+          <a:bodyPr wrap="square">
+            <a:spAutoFit/>
+          </a:bodyPr>
+          <a:lstStyle/>
+          <a:p>
+            <a:pPr algn="l">
+              <a:spcAft>
+                <a:spcPts val="400"/>
+              </a:spcAft>
+              <a:defRPr sz="1400" b="1">
+                <a:solidFill>
+                  <a:srgbClr val="1F77B4"/>
+                </a:solidFill>
+                <a:latin typeface="Calibri"/>
+              </a:defRPr>
+            </a:pPr>
+            <a:r>
+              <a:t>Kotthaus et al. 2016 (AMT) — CL31</a:t>
+            </a:r>
+          </a:p>
+          <a:p>
+            <a:pPr algn="l">
+              <a:spcAft>
+                <a:spcPts val="400"/>
+              </a:spcAft>
+              <a:defRPr sz="1200" b="0">
+                <a:solidFill>
+                  <a:srgbClr val="36454F"/>
+                </a:solidFill>
+                <a:latin typeface="Calibri"/>
+              </a:defRPr>
+            </a:pPr>
+            <a:r>
+              <a:t>APD couplee en AC avec « zero variable » : baseline negative dependante de la distance (« cosmetic shift »), non nulle jusqu'a ~5.5 km, dependante de la temperature ; correction hood OBLIGATOIRE avant calibration. Le cas d'ecole du couplage AC.</a:t>
+            </a:r>
+          </a:p>
+        </p:txBody>
+      </p:sp>
+      <p:sp>
+        <p:nvSpPr>
+          <p:cNvPr id="5" name="TextBox 4"/>
+          <p:cNvSpPr txBox="1"/>
+          <p:nvPr/>
+        </p:nvSpPr>
+        <p:spPr>
+          <a:xfrm>
+            <a:off x="4434840" y="1554480"/>
+            <a:ext cx="3566160" cy="4389120"/>
+          </a:xfrm>
+          <a:prstGeom prst="rect">
+            <a:avLst/>
+          </a:prstGeom>
+          <a:noFill/>
+        </p:spPr>
+        <p:txBody>
+          <a:bodyPr wrap="square">
+            <a:spAutoFit/>
+          </a:bodyPr>
+          <a:lstStyle/>
+          <a:p>
+            <a:pPr algn="l">
+              <a:spcAft>
+                <a:spcPts val="400"/>
+              </a:spcAft>
+              <a:defRPr sz="1400" b="1">
+                <a:solidFill>
+                  <a:srgbClr val="1F77B4"/>
+                </a:solidFill>
+                <a:latin typeface="Calibri"/>
+              </a:defRPr>
+            </a:pPr>
+            <a:r>
+              <a:t>Le et al. 2026 (AMT, en revision) — CL61</a:t>
+            </a:r>
+          </a:p>
+          <a:p>
+            <a:pPr algn="l">
+              <a:spcAft>
+                <a:spcPts val="400"/>
+              </a:spcAft>
+              <a:defRPr sz="1200" b="0">
+                <a:solidFill>
+                  <a:srgbClr val="36454F"/>
+                </a:solidFill>
+                <a:latin typeface="Calibri"/>
+              </a:defRPr>
+            </a:pPr>
+            <a:r>
+              <a:t>« Residual background components may still remain » apres la correction interne ; soustraction hood P(r,T) indexee en temperature, repetee tous les ~6 mois ; une unite biaisee des 5 km — dans la fenetre Rayleigh.</a:t>
+            </a:r>
+          </a:p>
+        </p:txBody>
+      </p:sp>
+      <p:sp>
+        <p:nvSpPr>
+          <p:cNvPr id="6" name="TextBox 5"/>
+          <p:cNvSpPr txBox="1"/>
+          <p:nvPr/>
+        </p:nvSpPr>
+        <p:spPr>
+          <a:xfrm>
+            <a:off x="8366760" y="1554480"/>
+            <a:ext cx="3566160" cy="4389120"/>
+          </a:xfrm>
+          <a:prstGeom prst="rect">
+            <a:avLst/>
+          </a:prstGeom>
+          <a:noFill/>
+        </p:spPr>
+        <p:txBody>
+          <a:bodyPr wrap="square">
+            <a:spAutoFit/>
+          </a:bodyPr>
+          <a:lstStyle/>
+          <a:p>
+            <a:pPr algn="l">
+              <a:spcAft>
+                <a:spcPts val="400"/>
+              </a:spcAft>
+              <a:defRPr sz="1400" b="1">
+                <a:solidFill>
+                  <a:srgbClr val="1F77B4"/>
+                </a:solidFill>
+                <a:latin typeface="Calibri"/>
+              </a:defRPr>
+            </a:pPr>
+            <a:r>
+              <a:t>Hopkin 2019 · Looschelders 2025 · electronique nucleaire</a:t>
+            </a:r>
+          </a:p>
+          <a:p>
+            <a:pPr algn="l">
+              <a:spcAft>
+                <a:spcPts val="400"/>
+              </a:spcAft>
+              <a:defRPr sz="1200" b="0">
+                <a:solidFill>
+                  <a:srgbClr val="36454F"/>
+                </a:solidFill>
+                <a:latin typeface="Calibri"/>
+              </a:defRPr>
+            </a:pPr>
+            <a:r>
+              <a:t>« Doivent etre corriges pour les signaux faibles… negligeables pour les nuages » → la divergence exacte de nos 2 methodes. Le baseline shift des chaines AC a fort taux est un classique (Knoll) : remede = baseline restorer / compensation pole-zero.</a:t>
+            </a:r>
+          </a:p>
+        </p:txBody>
+      </p:sp>
+      <p:sp>
+        <p:nvSpPr>
+          <p:cNvPr id="7" name="TextBox 6"/>
+          <p:cNvSpPr txBox="1"/>
+          <p:nvPr/>
+        </p:nvSpPr>
+        <p:spPr>
+          <a:xfrm>
+            <a:off x="502920" y="5943600"/>
+            <a:ext cx="11155680" cy="640080"/>
+          </a:xfrm>
+          <a:prstGeom prst="rect">
+            <a:avLst/>
+          </a:prstGeom>
+          <a:noFill/>
+        </p:spPr>
+        <p:txBody>
+          <a:bodyPr wrap="square">
+            <a:spAutoFit/>
+          </a:bodyPr>
+          <a:lstStyle/>
+          <a:p>
+            <a:pPr algn="l">
+              <a:spcAft>
+                <a:spcPts val="400"/>
+              </a:spcAft>
+              <a:defRPr sz="1300" b="1">
+                <a:solidFill>
+                  <a:srgbClr val="36454F"/>
+                </a:solidFill>
+                <a:latin typeface="Calibri"/>
+              </a:defRPr>
+            </a:pPr>
+            <a:r>
+              <a:t>Nouveaute : (i) quantifier le biais de C_L induit par l'offset dans un ajustement moleculaire 2–6 km ; (ii) un MODELE physique de l'offset (reponse a couplage AC, τ_p / τ_u) — extrapolable en distance, indexable en temperature.</a:t>
+            </a:r>
+          </a:p>
+        </p:txBody>
+      </p:sp>
+    </p:spTree>
+  </p:cSld>
+  <p:clrMapOvr>
+    <a:masterClrMapping/>
+  </p:clrMapOvr>
+</p:sld>
+</file>
+
+<file path=ppt/slides/slide12.xml><?xml version="1.0" encoding="utf-8"?>
+<p:sld xmlns:a="http://schemas.openxmlformats.org/drawingml/2006/main" xmlns:p="http://schemas.openxmlformats.org/presentationml/2006/main" xmlns:r="http://schemas.openxmlformats.org/officeDocument/2006/relationships">
+  <p:cSld>
+    <p:spTree>
+      <p:nvGrpSpPr>
+        <p:cNvPr id="1" name=""/>
+        <p:cNvGrpSpPr/>
+        <p:nvPr/>
+      </p:nvGrpSpPr>
+      <p:grpSpPr/>
+      <p:sp>
+        <p:nvSpPr>
+          <p:cNvPr id="2" name="TextBox 1"/>
+          <p:cNvSpPr txBox="1"/>
+          <p:nvPr/>
+        </p:nvSpPr>
+        <p:spPr>
+          <a:xfrm>
+            <a:off x="502920" y="256032"/>
+            <a:ext cx="11155680" cy="822960"/>
+          </a:xfrm>
+          <a:prstGeom prst="rect">
+            <a:avLst/>
+          </a:prstGeom>
+          <a:noFill/>
+        </p:spPr>
+        <p:txBody>
+          <a:bodyPr wrap="square">
+            <a:spAutoFit/>
+          </a:bodyPr>
+          <a:lstStyle/>
+          <a:p>
+            <a:pPr algn="l">
+              <a:spcAft>
+                <a:spcPts val="400"/>
+              </a:spcAft>
+              <a:defRPr sz="3000" b="1">
+                <a:solidFill>
+                  <a:srgbClr val="36454F"/>
+                </a:solidFill>
+                <a:latin typeface="Cambria"/>
+              </a:defRPr>
+            </a:pPr>
+            <a:r>
+              <a:t>Solutions</a:t>
+            </a:r>
+          </a:p>
+        </p:txBody>
+      </p:sp>
+      <p:sp>
+        <p:nvSpPr>
+          <p:cNvPr id="3" name="TextBox 2"/>
+          <p:cNvSpPr txBox="1"/>
+          <p:nvPr/>
+        </p:nvSpPr>
+        <p:spPr>
+          <a:xfrm>
+            <a:off x="502920" y="868680"/>
+            <a:ext cx="11155680" cy="457200"/>
+          </a:xfrm>
+          <a:prstGeom prst="rect">
+            <a:avLst/>
+          </a:prstGeom>
+          <a:noFill/>
+        </p:spPr>
+        <p:txBody>
+          <a:bodyPr wrap="square">
+            <a:spAutoFit/>
+          </a:bodyPr>
+          <a:lstStyle/>
+          <a:p>
+            <a:pPr algn="l">
+              <a:spcAft>
+                <a:spcPts val="400"/>
+              </a:spcAft>
+              <a:defRPr sz="1300" b="0">
+                <a:solidFill>
+                  <a:srgbClr val="6E7B84"/>
+                </a:solidFill>
+                <a:latin typeface="Calibri"/>
+              </a:defRPr>
+            </a:pPr>
+            <a:r>
               <a:t>Materielles (constructeur) et operationnelles (reseau)</a:t>
             </a:r>
           </a:p>
@@ -3891,7 +4147,7 @@
 </p:sld>
 </file>
 
-<file path=ppt/slides/slide12.xml><?xml version="1.0" encoding="utf-8"?>
+<file path=ppt/slides/slide13.xml><?xml version="1.0" encoding="utf-8"?>
 <p:sld xmlns:a="http://schemas.openxmlformats.org/drawingml/2006/main" xmlns:p="http://schemas.openxmlformats.org/presentationml/2006/main" xmlns:r="http://schemas.openxmlformats.org/officeDocument/2006/relationships">
   <p:cSld>
     <p:bg>
@@ -4014,7 +4270,7 @@
               </a:defRPr>
             </a:pPr>
             <a:r>
-              <a:t>3.  Le signe de l'offset, propre a chaque unite, explique tout le reseau (Lindenberg positif → ratio inverse ; Aoste/Uccle saisonniers → cycles).</a:t>
+              <a:t>3.  Le phenomene est general : coherent sur tout le reseau CL61 (Lindenberg, Aoste, Uccle) ET universel entre types d'instruments — le CHM15k (ancre) porte lui-meme −15…−25 % (biais verifie +11.5 %), mais sa constante NUAGE reste immunisee.</a:t>
             </a:r>
           </a:p>
           <a:p>

--- a/presentation/CL61_offset_electronique_FR.pptx
+++ b/presentation/CL61_offset_electronique_FR.pptx
@@ -3346,8 +3346,8 @@
         </p:nvSpPr>
         <p:spPr>
           <a:xfrm>
-            <a:off x="8366760" y="1508760"/>
-            <a:ext cx="3611880" cy="4937760"/>
+            <a:off x="8366760" y="1463040"/>
+            <a:ext cx="3611880" cy="5029200"/>
           </a:xfrm>
           <a:prstGeom prst="rect">
             <a:avLst/>
@@ -3366,13 +3366,45 @@
               </a:spcAft>
               <a:defRPr sz="1300" b="1">
                 <a:solidFill>
+                  <a:srgbClr val="36454F"/>
+                </a:solidFill>
+                <a:latin typeface="Calibri"/>
+              </a:defRPr>
+            </a:pPr>
+            <a:r>
+              <a:t>Un offset present partout...</a:t>
+            </a:r>
+          </a:p>
+          <a:p>
+            <a:pPr algn="l">
+              <a:spcAft>
+                <a:spcPts val="400"/>
+              </a:spcAft>
+              <a:defRPr sz="1100" b="0">
+                <a:solidFill>
+                  <a:srgbClr val="36454F"/>
+                </a:solidFill>
+                <a:latin typeface="Calibri"/>
+              </a:defRPr>
+            </a:pPr>
+            <a:r>
+              <a:t>statistiquement reel : CL61 −12.4σ, CHM15k −5.4σ (donc PAS un artefact de moyennage) — mais ~100× sous le bruit par tir, invisible profil par profil.</a:t>
+            </a:r>
+          </a:p>
+          <a:p>
+            <a:pPr algn="l">
+              <a:spcAft>
+                <a:spcPts val="400"/>
+              </a:spcAft>
+              <a:defRPr sz="1300" b="1">
+                <a:solidFill>
                   <a:srgbClr val="D62728"/>
                 </a:solidFill>
                 <a:latin typeface="Calibri"/>
               </a:defRPr>
             </a:pPr>
             <a:r>
-              <a:t>CHM15k (la reference !)</a:t>
+              <a:t>...mais materiel pour le seul CL61</a:t>
             </a:r>
           </a:p>
           <a:p>
@@ -3388,15 +3420,15 @@
               </a:defRPr>
             </a:pPr>
             <a:r>
-              <a:t>−15…−25 % dans la fenetre 3-5 km — PLUS GRAND que le CL61. Verifie : offset retire → C_L +11.5 % (vrai biais de calibration).</a:t>
-            </a:r>
-          </a:p>
-          <a:p>
-            <a:pPr algn="l">
-              <a:spcAft>
-                <a:spcPts val="400"/>
-              </a:spcAft>
-              <a:defRPr sz="1300" b="1">
+              <a:t>CL61 : biais DEMONTRE (recal −26.5 %→−8.3 %, hors du scatter ~5 %).</a:t>
+            </a:r>
+          </a:p>
+          <a:p>
+            <a:pPr algn="l">
+              <a:spcAft>
+                <a:spcPts val="400"/>
+              </a:spcAft>
+              <a:defRPr sz="1100" b="0">
                 <a:solidFill>
                   <a:srgbClr val="1F77B4"/>
                 </a:solidFill>
@@ -3404,7 +3436,7 @@
               </a:defRPr>
             </a:pPr>
             <a:r>
-              <a:t>Mais l'ancre tient</a:t>
+              <a:t>CHM15k (ancre) : −18 % du (tres faible) moleculaire 1064 nm a 3-5 km, mais DANS le scatter de calibration (13 %, 4/15 nuits) → pas un biais demontre. Calibration valide (accord EARLINET / CL61-nuage).</a:t>
             </a:r>
           </a:p>
           <a:p>
@@ -3414,61 +3446,29 @@
               </a:spcAft>
               <a:defRPr sz="1100" b="0">
                 <a:solidFill>
-                  <a:srgbClr val="36454F"/>
+                  <a:srgbClr val="9467BD"/>
                 </a:solidFill>
                 <a:latin typeface="Calibri"/>
               </a:defRPr>
             </a:pPr>
             <a:r>
-              <a:t>la constante NUAGE du CHM15k vient du signal fort proche (0.1-2.4 km), immunisee → aucune constante Rayleigh de ceilometre n'est une reference propre.</a:t>
-            </a:r>
-          </a:p>
-          <a:p>
-            <a:pPr algn="l">
-              <a:spcAft>
-                <a:spcPts val="400"/>
-              </a:spcAft>
-              <a:defRPr sz="1300" b="1">
-                <a:solidFill>
-                  <a:srgbClr val="9467BD"/>
+              <a:t>CL31 : pas de signal moleculaire a fitter (non calibrable Rayleigh).</a:t>
+            </a:r>
+          </a:p>
+          <a:p>
+            <a:pPr algn="l">
+              <a:spcAft>
+                <a:spcPts val="400"/>
+              </a:spcAft>
+              <a:defRPr sz="1050" b="0">
+                <a:solidFill>
+                  <a:srgbClr val="6E7B84"/>
                 </a:solidFill>
                 <a:latin typeface="Calibri"/>
               </a:defRPr>
             </a:pPr>
             <a:r>
-              <a:t>CL31 : non calibrable en Rayleigh</a:t>
-            </a:r>
-          </a:p>
-          <a:p>
-            <a:pPr algn="l">
-              <a:spcAft>
-                <a:spcPts val="400"/>
-              </a:spcAft>
-              <a:defRPr sz="1100" b="0">
-                <a:solidFill>
-                  <a:srgbClr val="36454F"/>
-                </a:solidFill>
-                <a:latin typeface="Calibri"/>
-              </a:defRPr>
-            </a:pPr>
-            <a:r>
-              <a:t>offset ≳ signal moleculaire a 3-5 km → explique le statut operationnel CL31/CL51.</a:t>
-            </a:r>
-          </a:p>
-          <a:p>
-            <a:pPr algn="l">
-              <a:spcAft>
-                <a:spcPts val="400"/>
-              </a:spcAft>
-              <a:defRPr sz="1050" b="0">
-                <a:solidFill>
-                  <a:srgbClr val="6E7B84"/>
-                </a:solidFill>
-                <a:latin typeface="Calibri"/>
-              </a:defRPr>
-            </a:pPr>
-            <a:r>
-              <a:t>Mecanisme different (CHM15k photon-counting = sur-soustraction fond/overlap ; CL61 = undershoot AC), mais effet net partage : offset negatif en signal faible.</a:t>
+              <a:t>La taille de l'offset / signal moleculaire decide s'il compte ; l'immunite proche-portee de la methode nuage = ancre robuste.</a:t>
             </a:r>
           </a:p>
         </p:txBody>
@@ -4270,7 +4270,7 @@
               </a:defRPr>
             </a:pPr>
             <a:r>
-              <a:t>3.  Le phenomene est general : coherent sur tout le reseau CL61 (Lindenberg, Aoste, Uccle) ET universel entre types d'instruments — le CHM15k (ancre) porte lui-meme −15…−25 % (biais verifie +11.5 %), mais sa constante NUAGE reste immunisee.</a:t>
+              <a:t>3.  Le phenomene est general : coherent sur le reseau CL61 (Lindenberg, Aoste, Uccle) ET present dans les 3 types d'instruments (offset reel : CL61 −12.4σ, CHM15k −5.4σ). Mais seul le CL61 est assez grand pour biaiser sa calibration ; le CHM15k reste dans son bruit de calibration (ancre valide).</a:t>
             </a:r>
           </a:p>
           <a:p>
